--- a/diplom_project/Дипломный проект.pptx
+++ b/diplom_project/Дипломный проект.pptx
@@ -15,11 +15,12 @@
     <p:sldId id="263" r:id="rId9"/>
     <p:sldId id="264" r:id="rId10"/>
     <p:sldId id="270" r:id="rId11"/>
-    <p:sldId id="265" r:id="rId12"/>
-    <p:sldId id="266" r:id="rId13"/>
-    <p:sldId id="267" r:id="rId14"/>
-    <p:sldId id="268" r:id="rId15"/>
-    <p:sldId id="269" r:id="rId16"/>
+    <p:sldId id="271" r:id="rId12"/>
+    <p:sldId id="265" r:id="rId13"/>
+    <p:sldId id="266" r:id="rId14"/>
+    <p:sldId id="267" r:id="rId15"/>
+    <p:sldId id="268" r:id="rId16"/>
+    <p:sldId id="269" r:id="rId17"/>
   </p:sldIdLst>
   <p:sldSz cx="12192000" cy="6858000"/>
   <p:notesSz cx="6858000" cy="9144000"/>
@@ -312,7 +313,7 @@
           <a:p>
             <a:fld id="{D9438711-AF0F-4D56-B1AC-50A9AFF08683}" type="datetimeFigureOut">
               <a:rPr lang="ru-RU" smtClean="0"/>
-              <a:t>26.05.2026</a:t>
+              <a:t>29.05.2026</a:t>
             </a:fld>
             <a:endParaRPr lang="ru-RU"/>
           </a:p>
@@ -587,7 +588,7 @@
           <a:p>
             <a:fld id="{D9438711-AF0F-4D56-B1AC-50A9AFF08683}" type="datetimeFigureOut">
               <a:rPr lang="ru-RU" smtClean="0"/>
-              <a:t>26.05.2026</a:t>
+              <a:t>29.05.2026</a:t>
             </a:fld>
             <a:endParaRPr lang="ru-RU"/>
           </a:p>
@@ -781,7 +782,7 @@
           <a:p>
             <a:fld id="{D9438711-AF0F-4D56-B1AC-50A9AFF08683}" type="datetimeFigureOut">
               <a:rPr lang="ru-RU" smtClean="0"/>
-              <a:t>26.05.2026</a:t>
+              <a:t>29.05.2026</a:t>
             </a:fld>
             <a:endParaRPr lang="ru-RU"/>
           </a:p>
@@ -1054,7 +1055,7 @@
           <a:p>
             <a:fld id="{D9438711-AF0F-4D56-B1AC-50A9AFF08683}" type="datetimeFigureOut">
               <a:rPr lang="ru-RU" smtClean="0"/>
-              <a:t>26.05.2026</a:t>
+              <a:t>29.05.2026</a:t>
             </a:fld>
             <a:endParaRPr lang="ru-RU"/>
           </a:p>
@@ -1395,7 +1396,7 @@
           <a:p>
             <a:fld id="{D9438711-AF0F-4D56-B1AC-50A9AFF08683}" type="datetimeFigureOut">
               <a:rPr lang="ru-RU" smtClean="0"/>
-              <a:t>26.05.2026</a:t>
+              <a:t>29.05.2026</a:t>
             </a:fld>
             <a:endParaRPr lang="ru-RU"/>
           </a:p>
@@ -2018,7 +2019,7 @@
           <a:p>
             <a:fld id="{D9438711-AF0F-4D56-B1AC-50A9AFF08683}" type="datetimeFigureOut">
               <a:rPr lang="ru-RU" smtClean="0"/>
-              <a:t>26.05.2026</a:t>
+              <a:t>29.05.2026</a:t>
             </a:fld>
             <a:endParaRPr lang="ru-RU"/>
           </a:p>
@@ -2878,7 +2879,7 @@
           <a:p>
             <a:fld id="{D9438711-AF0F-4D56-B1AC-50A9AFF08683}" type="datetimeFigureOut">
               <a:rPr lang="ru-RU" smtClean="0"/>
-              <a:t>26.05.2026</a:t>
+              <a:t>29.05.2026</a:t>
             </a:fld>
             <a:endParaRPr lang="ru-RU"/>
           </a:p>
@@ -3048,7 +3049,7 @@
           <a:p>
             <a:fld id="{D9438711-AF0F-4D56-B1AC-50A9AFF08683}" type="datetimeFigureOut">
               <a:rPr lang="ru-RU" smtClean="0"/>
-              <a:t>26.05.2026</a:t>
+              <a:t>29.05.2026</a:t>
             </a:fld>
             <a:endParaRPr lang="ru-RU"/>
           </a:p>
@@ -3228,7 +3229,7 @@
           <a:p>
             <a:fld id="{D9438711-AF0F-4D56-B1AC-50A9AFF08683}" type="datetimeFigureOut">
               <a:rPr lang="ru-RU" smtClean="0"/>
-              <a:t>26.05.2026</a:t>
+              <a:t>29.05.2026</a:t>
             </a:fld>
             <a:endParaRPr lang="ru-RU"/>
           </a:p>
@@ -3398,7 +3399,7 @@
           <a:p>
             <a:fld id="{D9438711-AF0F-4D56-B1AC-50A9AFF08683}" type="datetimeFigureOut">
               <a:rPr lang="ru-RU" smtClean="0"/>
-              <a:t>26.05.2026</a:t>
+              <a:t>29.05.2026</a:t>
             </a:fld>
             <a:endParaRPr lang="ru-RU"/>
           </a:p>
@@ -3645,7 +3646,7 @@
           <a:p>
             <a:fld id="{D9438711-AF0F-4D56-B1AC-50A9AFF08683}" type="datetimeFigureOut">
               <a:rPr lang="ru-RU" smtClean="0"/>
-              <a:t>26.05.2026</a:t>
+              <a:t>29.05.2026</a:t>
             </a:fld>
             <a:endParaRPr lang="ru-RU"/>
           </a:p>
@@ -3937,7 +3938,7 @@
           <a:p>
             <a:fld id="{D9438711-AF0F-4D56-B1AC-50A9AFF08683}" type="datetimeFigureOut">
               <a:rPr lang="ru-RU" smtClean="0"/>
-              <a:t>26.05.2026</a:t>
+              <a:t>29.05.2026</a:t>
             </a:fld>
             <a:endParaRPr lang="ru-RU"/>
           </a:p>
@@ -4381,7 +4382,7 @@
           <a:p>
             <a:fld id="{D9438711-AF0F-4D56-B1AC-50A9AFF08683}" type="datetimeFigureOut">
               <a:rPr lang="ru-RU" smtClean="0"/>
-              <a:t>26.05.2026</a:t>
+              <a:t>29.05.2026</a:t>
             </a:fld>
             <a:endParaRPr lang="ru-RU"/>
           </a:p>
@@ -4499,7 +4500,7 @@
           <a:p>
             <a:fld id="{D9438711-AF0F-4D56-B1AC-50A9AFF08683}" type="datetimeFigureOut">
               <a:rPr lang="ru-RU" smtClean="0"/>
-              <a:t>26.05.2026</a:t>
+              <a:t>29.05.2026</a:t>
             </a:fld>
             <a:endParaRPr lang="ru-RU"/>
           </a:p>
@@ -4594,7 +4595,7 @@
           <a:p>
             <a:fld id="{D9438711-AF0F-4D56-B1AC-50A9AFF08683}" type="datetimeFigureOut">
               <a:rPr lang="ru-RU" smtClean="0"/>
-              <a:t>26.05.2026</a:t>
+              <a:t>29.05.2026</a:t>
             </a:fld>
             <a:endParaRPr lang="ru-RU"/>
           </a:p>
@@ -4873,7 +4874,7 @@
           <a:p>
             <a:fld id="{D9438711-AF0F-4D56-B1AC-50A9AFF08683}" type="datetimeFigureOut">
               <a:rPr lang="ru-RU" smtClean="0"/>
-              <a:t>26.05.2026</a:t>
+              <a:t>29.05.2026</a:t>
             </a:fld>
             <a:endParaRPr lang="ru-RU"/>
           </a:p>
@@ -5148,7 +5149,7 @@
           <a:p>
             <a:fld id="{D9438711-AF0F-4D56-B1AC-50A9AFF08683}" type="datetimeFigureOut">
               <a:rPr lang="ru-RU" smtClean="0"/>
-              <a:t>26.05.2026</a:t>
+              <a:t>29.05.2026</a:t>
             </a:fld>
             <a:endParaRPr lang="ru-RU"/>
           </a:p>
@@ -5577,7 +5578,7 @@
           <a:p>
             <a:fld id="{D9438711-AF0F-4D56-B1AC-50A9AFF08683}" type="datetimeFigureOut">
               <a:rPr lang="ru-RU" smtClean="0"/>
-              <a:t>26.05.2026</a:t>
+              <a:t>29.05.2026</a:t>
             </a:fld>
             <a:endParaRPr lang="ru-RU"/>
           </a:p>
@@ -6316,19 +6317,11 @@
             </a:r>
             <a:r>
               <a:rPr lang="ru-RU" dirty="0"/>
-              <a:t>модель </a:t>
-            </a:r>
-            <a:r>
-              <a:rPr lang="ru-RU" dirty="0"/>
-              <a:t>Адаптивный </a:t>
-            </a:r>
-            <a:r>
-              <a:rPr lang="ru-RU" dirty="0" smtClean="0"/>
-              <a:t>тренд</a:t>
-            </a:r>
-            <a:r>
-              <a:rPr lang="ru-RU" dirty="0" smtClean="0"/>
-              <a:t>(</a:t>
+              <a:t>модель Адаптивный </a:t>
+            </a:r>
+            <a:r>
+              <a:rPr lang="ru-RU" dirty="0" smtClean="0"/>
+              <a:t>тренд(</a:t>
             </a:r>
             <a:r>
               <a:rPr lang="en-US" dirty="0"/>
@@ -6382,7 +6375,7 @@
           <p:nvPr>
             <p:extLst>
               <p:ext uri="{D42A27DB-BD31-4B8C-83A1-F6EECF244321}">
-                <p14:modId xmlns:p14="http://schemas.microsoft.com/office/powerpoint/2010/main" val="43896073"/>
+                <p14:modId xmlns:p14="http://schemas.microsoft.com/office/powerpoint/2010/main" val="2677236649"/>
               </p:ext>
             </p:extLst>
           </p:nvPr>
@@ -6835,7 +6828,11 @@
                     <a:p>
                       <a:r>
                         <a:rPr lang="ru-RU" dirty="0" smtClean="0"/>
-                        <a:t>$119</a:t>
+                        <a:t>$</a:t>
+                      </a:r>
+                      <a:r>
+                        <a:rPr lang="ru-RU" dirty="0" smtClean="0"/>
+                        <a:t>119</a:t>
                       </a:r>
                       <a:endParaRPr lang="ru-RU" dirty="0"/>
                     </a:p>
@@ -6933,12 +6930,87 @@
           <a:lstStyle/>
           <a:p>
             <a:r>
-              <a:rPr lang="ru-RU" dirty="0" err="1" smtClean="0"/>
-              <a:t>Дашборд</a:t>
-            </a:r>
-            <a:r>
-              <a:rPr lang="ru-RU" dirty="0" smtClean="0"/>
-              <a:t> бизнес-аналитика</a:t>
+              <a:rPr lang="ru-RU" dirty="0" smtClean="0"/>
+              <a:t>Оркестрация</a:t>
+            </a:r>
+            <a:endParaRPr lang="ru-RU" dirty="0"/>
+          </a:p>
+        </p:txBody>
+      </p:sp>
+      <p:pic>
+        <p:nvPicPr>
+          <p:cNvPr id="4" name="Объект 3"/>
+          <p:cNvPicPr>
+            <a:picLocks noGrp="1" noChangeAspect="1"/>
+          </p:cNvPicPr>
+          <p:nvPr>
+            <p:ph idx="1"/>
+          </p:nvPr>
+        </p:nvPicPr>
+        <p:blipFill>
+          <a:blip r:embed="rId2"/>
+          <a:stretch>
+            <a:fillRect/>
+          </a:stretch>
+        </p:blipFill>
+        <p:spPr>
+          <a:xfrm>
+            <a:off x="567266" y="1152983"/>
+            <a:ext cx="10447867" cy="5518750"/>
+          </a:xfrm>
+          <a:prstGeom prst="rect">
+            <a:avLst/>
+          </a:prstGeom>
+        </p:spPr>
+      </p:pic>
+    </p:spTree>
+    <p:extLst>
+      <p:ext uri="{BB962C8B-B14F-4D97-AF65-F5344CB8AC3E}">
+        <p14:creationId xmlns:p14="http://schemas.microsoft.com/office/powerpoint/2010/main" val="334809850"/>
+      </p:ext>
+    </p:extLst>
+  </p:cSld>
+  <p:clrMapOvr>
+    <a:masterClrMapping/>
+  </p:clrMapOvr>
+</p:sld>
+</file>
+
+<file path=ppt/slides/slide12.xml><?xml version="1.0" encoding="utf-8"?>
+<p:sld xmlns:a="http://schemas.openxmlformats.org/drawingml/2006/main" xmlns:r="http://schemas.openxmlformats.org/officeDocument/2006/relationships" xmlns:p="http://schemas.openxmlformats.org/presentationml/2006/main">
+  <p:cSld>
+    <p:spTree>
+      <p:nvGrpSpPr>
+        <p:cNvPr id="1" name=""/>
+        <p:cNvGrpSpPr/>
+        <p:nvPr/>
+      </p:nvGrpSpPr>
+      <p:grpSpPr>
+        <a:xfrm>
+          <a:off x="0" y="0"/>
+          <a:ext cx="0" cy="0"/>
+          <a:chOff x="0" y="0"/>
+          <a:chExt cx="0" cy="0"/>
+        </a:xfrm>
+      </p:grpSpPr>
+      <p:sp>
+        <p:nvSpPr>
+          <p:cNvPr id="2" name="Заголовок 1"/>
+          <p:cNvSpPr>
+            <a:spLocks noGrp="1"/>
+          </p:cNvSpPr>
+          <p:nvPr>
+            <p:ph type="title"/>
+          </p:nvPr>
+        </p:nvSpPr>
+        <p:spPr/>
+        <p:txBody>
+          <a:bodyPr/>
+          <a:lstStyle/>
+          <a:p>
+            <a:r>
+              <a:rPr lang="ru-RU" dirty="0" smtClean="0"/>
+              <a:t>Дашборд бизнес-аналитика</a:t>
             </a:r>
             <a:endParaRPr lang="ru-RU" dirty="0"/>
           </a:p>
@@ -6993,7 +7065,7 @@
 </p:sld>
 </file>
 
-<file path=ppt/slides/slide12.xml><?xml version="1.0" encoding="utf-8"?>
+<file path=ppt/slides/slide13.xml><?xml version="1.0" encoding="utf-8"?>
 <p:sld xmlns:a="http://schemas.openxmlformats.org/drawingml/2006/main" xmlns:r="http://schemas.openxmlformats.org/officeDocument/2006/relationships" xmlns:p="http://schemas.openxmlformats.org/presentationml/2006/main">
   <p:cSld>
     <p:spTree>
@@ -7026,12 +7098,8 @@
           <a:lstStyle/>
           <a:p>
             <a:r>
-              <a:rPr lang="ru-RU" dirty="0" err="1" smtClean="0"/>
-              <a:t>Дашборд</a:t>
-            </a:r>
-            <a:r>
-              <a:rPr lang="ru-RU" dirty="0" smtClean="0"/>
-              <a:t> </a:t>
+              <a:rPr lang="ru-RU" dirty="0" smtClean="0"/>
+              <a:t>Дашборд </a:t>
             </a:r>
             <a:r>
               <a:rPr lang="en-US" dirty="0" smtClean="0"/>
@@ -7045,33 +7113,47 @@
           </a:p>
         </p:txBody>
       </p:sp>
+      <p:sp>
+        <p:nvSpPr>
+          <p:cNvPr id="3" name="Объект 2"/>
+          <p:cNvSpPr>
+            <a:spLocks noGrp="1"/>
+          </p:cNvSpPr>
+          <p:nvPr>
+            <p:ph idx="1"/>
+          </p:nvPr>
+        </p:nvSpPr>
+        <p:spPr/>
+        <p:txBody>
+          <a:bodyPr/>
+          <a:lstStyle/>
+          <a:p>
+            <a:endParaRPr lang="ru-RU"/>
+          </a:p>
+        </p:txBody>
+      </p:sp>
       <p:pic>
         <p:nvPicPr>
-          <p:cNvPr id="4" name="Объект 3"/>
+          <p:cNvPr id="5" name="Рисунок 4"/>
           <p:cNvPicPr>
-            <a:picLocks noGrp="1" noChangeAspect="1"/>
+            <a:picLocks noChangeAspect="1"/>
           </p:cNvPicPr>
-          <p:nvPr>
-            <p:ph idx="1"/>
-          </p:nvPr>
+          <p:nvPr/>
         </p:nvPicPr>
         <p:blipFill>
-          <a:blip r:embed="rId2">
-            <a:extLst>
-              <a:ext uri="{28A0092B-C50C-407E-A947-70E740481C1C}">
-                <a14:useLocalDpi xmlns:a14="http://schemas.microsoft.com/office/drawing/2010/main" val="0"/>
-              </a:ext>
-            </a:extLst>
-          </a:blip>
+          <a:blip r:embed="rId2"/>
           <a:stretch>
             <a:fillRect/>
           </a:stretch>
         </p:blipFill>
         <p:spPr>
           <a:xfrm>
-            <a:off x="2345268" y="1152983"/>
-            <a:ext cx="6689554" cy="5322588"/>
+            <a:off x="1028592" y="1320900"/>
+            <a:ext cx="9095979" cy="5410100"/>
           </a:xfrm>
+          <a:prstGeom prst="rect">
+            <a:avLst/>
+          </a:prstGeom>
         </p:spPr>
       </p:pic>
     </p:spTree>
@@ -7094,7 +7176,7 @@
 </p:sld>
 </file>
 
-<file path=ppt/slides/slide13.xml><?xml version="1.0" encoding="utf-8"?>
+<file path=ppt/slides/slide14.xml><?xml version="1.0" encoding="utf-8"?>
 <p:sld xmlns:a="http://schemas.openxmlformats.org/drawingml/2006/main" xmlns:r="http://schemas.openxmlformats.org/officeDocument/2006/relationships" xmlns:p="http://schemas.openxmlformats.org/presentationml/2006/main">
   <p:cSld>
     <p:spTree>
@@ -7127,12 +7209,8 @@
           <a:lstStyle/>
           <a:p>
             <a:r>
-              <a:rPr lang="ru-RU" dirty="0" err="1" smtClean="0"/>
-              <a:t>Дашборд</a:t>
-            </a:r>
-            <a:r>
-              <a:rPr lang="ru-RU" dirty="0" smtClean="0"/>
-              <a:t> метаданные</a:t>
+              <a:rPr lang="ru-RU" dirty="0" smtClean="0"/>
+              <a:t>Дашборд метаданные</a:t>
             </a:r>
             <a:endParaRPr lang="ru-RU" dirty="0"/>
           </a:p>
@@ -7187,7 +7265,7 @@
 </p:sld>
 </file>
 
-<file path=ppt/slides/slide14.xml><?xml version="1.0" encoding="utf-8"?>
+<file path=ppt/slides/slide15.xml><?xml version="1.0" encoding="utf-8"?>
 <p:sld xmlns:a="http://schemas.openxmlformats.org/drawingml/2006/main" xmlns:r="http://schemas.openxmlformats.org/officeDocument/2006/relationships" xmlns:p="http://schemas.openxmlformats.org/presentationml/2006/main">
   <p:cSld>
     <p:spTree>
@@ -7239,13 +7317,13 @@
         </p:nvSpPr>
         <p:spPr>
           <a:xfrm>
-            <a:off x="646112" y="1380068"/>
-            <a:ext cx="9403742" cy="4868332"/>
+            <a:off x="646111" y="1380067"/>
+            <a:ext cx="10335155" cy="5308599"/>
           </a:xfrm>
         </p:spPr>
         <p:txBody>
           <a:bodyPr>
-            <a:normAutofit fontScale="47500" lnSpcReduction="20000"/>
+            <a:normAutofit fontScale="55000" lnSpcReduction="20000"/>
           </a:bodyPr>
           <a:lstStyle/>
           <a:p>
@@ -7333,7 +7411,6 @@
               <a:rPr lang="ru-RU" sz="2100" dirty="0"/>
               <a:t>$16,602</a:t>
             </a:r>
-            <a:endParaRPr lang="ru-RU" sz="2100" dirty="0"/>
           </a:p>
           <a:p>
             <a:pPr>
@@ -7346,15 +7423,7 @@
             </a:r>
             <a:r>
               <a:rPr lang="ru-RU" sz="2100" dirty="0"/>
-              <a:t>$</a:t>
-            </a:r>
-            <a:r>
-              <a:rPr lang="ru-RU" sz="2100" dirty="0"/>
-              <a:t>119</a:t>
-            </a:r>
-            <a:r>
-              <a:rPr lang="ru-RU" sz="2100" dirty="0"/>
-              <a:t>)</a:t>
+              <a:t>$119)</a:t>
             </a:r>
             <a:endParaRPr lang="en-US" sz="2100" dirty="0"/>
           </a:p>
@@ -7459,7 +7528,7 @@
               <a:t>6</a:t>
             </a:r>
             <a:r>
-              <a:rPr lang="en-US" smtClean="0"/>
+              <a:rPr lang="en-US" dirty="0" smtClean="0"/>
               <a:t> </a:t>
             </a:r>
             <a:r>
@@ -7492,6 +7561,20 @@
             <a:r>
               <a:rPr lang="en-US" dirty="0" smtClean="0"/>
               <a:t>Tableau</a:t>
+            </a:r>
+          </a:p>
+          <a:p>
+            <a:pPr>
+              <a:buFont typeface="Arial" panose="020B0604020202020204" pitchFamily="34" charset="0"/>
+              <a:buChar char="•"/>
+            </a:pPr>
+            <a:r>
+              <a:rPr lang="ru-RU" dirty="0" smtClean="0"/>
+              <a:t>Оркестрация в </a:t>
+            </a:r>
+            <a:r>
+              <a:rPr lang="en-US" dirty="0" smtClean="0"/>
+              <a:t>Airflow</a:t>
             </a:r>
           </a:p>
           <a:p>
@@ -7597,7 +7680,7 @@
 </p:sld>
 </file>
 
-<file path=ppt/slides/slide15.xml><?xml version="1.0" encoding="utf-8"?>
+<file path=ppt/slides/slide16.xml><?xml version="1.0" encoding="utf-8"?>
 <p:sld xmlns:a="http://schemas.openxmlformats.org/drawingml/2006/main" xmlns:r="http://schemas.openxmlformats.org/officeDocument/2006/relationships" xmlns:p="http://schemas.openxmlformats.org/presentationml/2006/main">
   <p:cSld>
     <p:spTree>
@@ -7864,6 +7947,28 @@
             </a:r>
             <a:endParaRPr lang="ru-RU" dirty="0" smtClean="0"/>
           </a:p>
+          <a:p>
+            <a:pPr marL="514350" indent="-514350">
+              <a:buAutoNum type="arabicPeriod"/>
+            </a:pPr>
+            <a:r>
+              <a:rPr lang="ru-RU" dirty="0" smtClean="0"/>
+              <a:t>Настроить </a:t>
+            </a:r>
+            <a:r>
+              <a:rPr lang="ru-RU" dirty="0" err="1" smtClean="0"/>
+              <a:t>оркестрацию</a:t>
+            </a:r>
+            <a:r>
+              <a:rPr lang="ru-RU" dirty="0" smtClean="0"/>
+              <a:t> в </a:t>
+            </a:r>
+            <a:r>
+              <a:rPr lang="en-US" dirty="0" smtClean="0"/>
+              <a:t>Apache Airflow</a:t>
+            </a:r>
+            <a:endParaRPr lang="ru-RU" dirty="0" smtClean="0"/>
+          </a:p>
         </p:txBody>
       </p:sp>
     </p:spTree>
@@ -7957,7 +8062,15 @@
             </a:r>
             <a:r>
               <a:rPr lang="ru-RU" dirty="0" smtClean="0"/>
-              <a:t> 3.9 - </a:t>
+              <a:t> </a:t>
+            </a:r>
+            <a:r>
+              <a:rPr lang="ru-RU" dirty="0" smtClean="0"/>
+              <a:t>3.12 </a:t>
+            </a:r>
+            <a:r>
+              <a:rPr lang="ru-RU" dirty="0" smtClean="0"/>
+              <a:t>- </a:t>
             </a:r>
             <a:r>
               <a:rPr lang="en-US" dirty="0" smtClean="0"/>
@@ -8016,6 +8129,33 @@
             <a:r>
               <a:rPr lang="ru-RU" dirty="0" smtClean="0"/>
               <a:t>модели</a:t>
+            </a:r>
+            <a:endParaRPr lang="en-US" dirty="0" smtClean="0"/>
+          </a:p>
+          <a:p>
+            <a:r>
+              <a:rPr lang="en-US" dirty="0"/>
+              <a:t>Airflow</a:t>
+            </a:r>
+            <a:r>
+              <a:rPr lang="ru-RU" dirty="0"/>
+              <a:t> </a:t>
+            </a:r>
+            <a:r>
+              <a:rPr lang="ru-RU" dirty="0"/>
+              <a:t>2.10.5</a:t>
+            </a:r>
+            <a:r>
+              <a:rPr lang="en-US" dirty="0"/>
+              <a:t> </a:t>
+            </a:r>
+            <a:r>
+              <a:rPr lang="en-US" dirty="0" smtClean="0"/>
+              <a:t>- </a:t>
+            </a:r>
+            <a:r>
+              <a:rPr lang="ru-RU" dirty="0" smtClean="0"/>
+              <a:t>Оркестровка</a:t>
             </a:r>
           </a:p>
           <a:p>
@@ -9212,11 +9352,7 @@
             </a:r>
             <a:r>
               <a:rPr lang="ru-RU" dirty="0"/>
-              <a:t>продаж </a:t>
-            </a:r>
-            <a:r>
-              <a:rPr lang="ru-RU" dirty="0"/>
-              <a:t>(Модель «Адаптивный тренд»</a:t>
+              <a:t>продаж (Модель «Адаптивный тренд»</a:t>
             </a:r>
             <a:r>
               <a:rPr lang="en-US" dirty="0" smtClean="0"/>
@@ -9257,27 +9393,19 @@
             </a:r>
             <a:r>
               <a:rPr lang="ru-RU" dirty="0"/>
-              <a:t>: MAE = </a:t>
+              <a:t>: MAE = $</a:t>
+            </a:r>
+            <a:r>
+              <a:rPr lang="ru-RU" dirty="0" smtClean="0"/>
+              <a:t>114 </a:t>
             </a:r>
             <a:r>
               <a:rPr lang="ru-RU" dirty="0"/>
-              <a:t>$119 (</a:t>
-            </a:r>
-            <a:r>
-              <a:rPr lang="ru-RU" dirty="0"/>
-              <a:t>ошибка </a:t>
-            </a:r>
-            <a:r>
-              <a:rPr lang="ru-RU" dirty="0" smtClean="0"/>
-              <a:t>~</a:t>
-            </a:r>
-            <a:r>
-              <a:rPr lang="ru-RU" dirty="0" smtClean="0"/>
-              <a:t>3,3</a:t>
-            </a:r>
-            <a:r>
-              <a:rPr lang="ru-RU" dirty="0" smtClean="0"/>
-              <a:t>% </a:t>
+              <a:t>(ошибка </a:t>
+            </a:r>
+            <a:r>
+              <a:rPr lang="ru-RU" dirty="0" smtClean="0"/>
+              <a:t>~3,3% </a:t>
             </a:r>
             <a:r>
               <a:rPr lang="ru-RU" dirty="0"/>
@@ -9295,11 +9423,7 @@
             </a:pPr>
             <a:r>
               <a:rPr lang="ru-RU" dirty="0"/>
-              <a:t>R² = </a:t>
-            </a:r>
-            <a:r>
-              <a:rPr lang="ru-RU" dirty="0"/>
-              <a:t>0.684 (модель объясняет 68% дисперсии)</a:t>
+              <a:t>R² = 0.684 (модель объясняет 68% дисперсии)</a:t>
             </a:r>
             <a:endParaRPr lang="ru-RU" dirty="0" smtClean="0"/>
           </a:p>
